--- a/chapter 23.pptx
+++ b/chapter 23.pptx
@@ -246,7 +246,7 @@
           <a:p>
             <a:fld id="{13928E3B-7122-43E6-B3BB-09448C56C96C}" type="datetimeFigureOut">
               <a:rPr lang="en-US" smtClean="0"/>
-              <a:t>25/05/15</a:t>
+              <a:t>25/07/16</a:t>
             </a:fld>
             <a:endParaRPr lang="en-US" dirty="0"/>
           </a:p>
@@ -424,7 +424,7 @@
           <a:p>
             <a:fld id="{B98C9CAF-43DF-44BF-8016-DC193E4E594B}" type="datetimeFigureOut">
               <a:rPr lang="en-US" smtClean="0"/>
-              <a:t>25/05/15</a:t>
+              <a:t>25/07/16</a:t>
             </a:fld>
             <a:endParaRPr lang="en-US" dirty="0"/>
           </a:p>
@@ -5176,7 +5176,7 @@
           <a:p>
             <a:r>
               <a:rPr lang="en-US" dirty="0"/>
-              <a:t>Each of the anti-patterns introduced in Section 23.2 can be identified in an automated fashion. </a:t>
+              <a:t>Each of the anti-patterns can be identified in an automated fashion. </a:t>
             </a:r>
           </a:p>
           <a:p>

--- a/chapter 23.pptx
+++ b/chapter 23.pptx
@@ -246,7 +246,7 @@
           <a:p>
             <a:fld id="{13928E3B-7122-43E6-B3BB-09448C56C96C}" type="datetimeFigureOut">
               <a:rPr lang="en-US" smtClean="0"/>
-              <a:t>25/07/16</a:t>
+              <a:t>25/07/24</a:t>
             </a:fld>
             <a:endParaRPr lang="en-US" dirty="0"/>
           </a:p>
@@ -424,7 +424,7 @@
           <a:p>
             <a:fld id="{B98C9CAF-43DF-44BF-8016-DC193E4E594B}" type="datetimeFigureOut">
               <a:rPr lang="en-US" smtClean="0"/>
-              <a:t>25/07/16</a:t>
+              <a:t>25/07/24</a:t>
             </a:fld>
             <a:endParaRPr lang="en-US" dirty="0"/>
           </a:p>
@@ -3783,7 +3783,7 @@
           <a:p>
             <a:r>
               <a:rPr lang="en-US" dirty="0"/>
-              <a:t>23.2 Discovering Hotspots</a:t>
+              <a:t>Discovering Hotspots</a:t>
             </a:r>
           </a:p>
         </p:txBody>
@@ -4001,7 +4001,7 @@
           <a:p>
             <a:r>
               <a:rPr lang="en-US" dirty="0"/>
-              <a:t>23.2 Discovering Hotspots</a:t>
+              <a:t>Discovering Hotspots</a:t>
             </a:r>
           </a:p>
         </p:txBody>
@@ -4298,7 +4298,7 @@
           <a:p>
             <a:r>
               <a:rPr lang="en-US" dirty="0"/>
-              <a:t>23.2 Discovering Hotspots</a:t>
+              <a:t>Discovering Hotspots</a:t>
             </a:r>
           </a:p>
         </p:txBody>
@@ -4666,7 +4666,7 @@
           <a:p>
             <a:r>
               <a:rPr lang="en-US" dirty="0"/>
-              <a:t>23.2 Discovering Hotspots</a:t>
+              <a:t>Discovering Hotspots</a:t>
             </a:r>
           </a:p>
         </p:txBody>
@@ -4832,7 +4832,7 @@
           <a:p>
             <a:r>
               <a:rPr lang="en-US" dirty="0"/>
-              <a:t>23.3 Example: Identifying Hotspots</a:t>
+              <a:t>Example: Identifying Hotspots</a:t>
             </a:r>
           </a:p>
         </p:txBody>
@@ -4984,7 +4984,7 @@
           <a:p>
             <a:r>
               <a:rPr lang="en-US" dirty="0"/>
-              <a:t>Quantifying Architecture Debt</a:t>
+              <a:t>Example: Quantifying Architecture Debt</a:t>
             </a:r>
           </a:p>
         </p:txBody>
@@ -5269,7 +5269,7 @@
           <a:p>
             <a:r>
               <a:rPr lang="en-US" dirty="0"/>
-              <a:t>23.4 Automation</a:t>
+              <a:t>Automation</a:t>
             </a:r>
           </a:p>
         </p:txBody>
@@ -5355,7 +5355,28 @@
           <a:bodyPr/>
           <a:lstStyle/>
           <a:p>
-            <a:endParaRPr lang="en-US"/>
+            <a:r>
+              <a:rPr lang="en-US" dirty="0"/>
+              <a:t>This chapter has presented a process for identifying and quantifying architecture debt in a project.  Architecture debt ,compared to code-based debt, is often harder to identify because its root causes are distributed among several files and their interrelationships.</a:t>
+            </a:r>
+          </a:p>
+          <a:p>
+            <a:r>
+              <a:rPr lang="en-US" dirty="0"/>
+              <a:t> The process outlined in this chapter involves gathering information from the project’s issue tracker, its revision control system, and the source code itself.</a:t>
+            </a:r>
+          </a:p>
+          <a:p>
+            <a:r>
+              <a:rPr lang="en-US" dirty="0"/>
+              <a:t>Using this information, architecture anti-patterns can be identified and grouped into hotspots, and the impact of these hotspots can be quantified.</a:t>
+            </a:r>
+          </a:p>
+          <a:p>
+            <a:r>
+              <a:rPr lang="en-US" dirty="0"/>
+              <a:t>Once architecture debt has been identified, if it is bad enough, it should be removed through refactoring. </a:t>
+            </a:r>
           </a:p>
         </p:txBody>
       </p:sp>
@@ -5382,7 +5403,7 @@
           <a:p>
             <a:r>
               <a:rPr lang="en-US" dirty="0"/>
-              <a:t>23.5 Summary</a:t>
+              <a:t>Summary</a:t>
             </a:r>
           </a:p>
         </p:txBody>
@@ -5584,7 +5605,68 @@
           <a:bodyPr/>
           <a:lstStyle/>
           <a:p>
-            <a:endParaRPr lang="en-US" dirty="0"/>
+            <a:r>
+              <a:rPr lang="en-US" dirty="0"/>
+              <a:t>Introduction</a:t>
+            </a:r>
+          </a:p>
+          <a:p>
+            <a:r>
+              <a:rPr lang="en-US" dirty="0"/>
+              <a:t>Determining Architecture Debt Problems</a:t>
+            </a:r>
+          </a:p>
+          <a:p>
+            <a:pPr lvl="1"/>
+            <a:r>
+              <a:rPr lang="en-US" dirty="0"/>
+              <a:t>Structural Dependencies</a:t>
+            </a:r>
+          </a:p>
+          <a:p>
+            <a:pPr lvl="1"/>
+            <a:r>
+              <a:rPr lang="en-US" dirty="0"/>
+              <a:t>Evolutionary Dependencies</a:t>
+            </a:r>
+          </a:p>
+          <a:p>
+            <a:r>
+              <a:rPr lang="en-US" dirty="0"/>
+              <a:t>Discovering Hotspots</a:t>
+            </a:r>
+          </a:p>
+          <a:p>
+            <a:r>
+              <a:rPr lang="en-US" dirty="0"/>
+              <a:t>Examples</a:t>
+            </a:r>
+          </a:p>
+          <a:p>
+            <a:pPr lvl="1"/>
+            <a:r>
+              <a:rPr lang="en-US" dirty="0"/>
+              <a:t>Identifying Hotspots</a:t>
+            </a:r>
+          </a:p>
+          <a:p>
+            <a:pPr lvl="1"/>
+            <a:r>
+              <a:rPr lang="en-US" dirty="0"/>
+              <a:t>Quantifying Architecture Debt</a:t>
+            </a:r>
+          </a:p>
+          <a:p>
+            <a:r>
+              <a:rPr lang="en-US" dirty="0"/>
+              <a:t>Automation</a:t>
+            </a:r>
+          </a:p>
+          <a:p>
+            <a:r>
+              <a:rPr lang="en-US" dirty="0"/>
+              <a:t>Summary</a:t>
+            </a:r>
           </a:p>
         </p:txBody>
       </p:sp>
@@ -6253,7 +6335,7 @@
           <a:p>
             <a:r>
               <a:rPr lang="en-US" dirty="0"/>
-              <a:t>23.1 Determining Architecture Debt Problems</a:t>
+              <a:t>Determining Architecture Debt Problems</a:t>
             </a:r>
           </a:p>
         </p:txBody>
